--- a/ВКР, отчет/ВКР, презентация.pptx
+++ b/ВКР, отчет/ВКР, презентация.pptx
@@ -228,7 +228,7 @@
           <a:p>
             <a:fld id="{6D4359DB-E3B5-42B0-BC8D-BB5F2F09E98B}" type="datetimeFigureOut">
               <a:rPr lang="ru-RU" smtClean="0"/>
-              <a:t>02.06.2026</a:t>
+              <a:t>11.06.2026</a:t>
             </a:fld>
             <a:endParaRPr lang="ru-RU"/>
           </a:p>
@@ -9550,6 +9550,14 @@
               <a:buChar char="•"/>
             </a:pPr>
             <a:r>
+              <a:rPr lang="ru-RU" dirty="0">
+                <a:solidFill>
+                  <a:srgbClr val="000000"/>
+                </a:solidFill>
+              </a:rPr>
+              <a:t>«</a:t>
+            </a:r>
+            <a:r>
               <a:rPr lang="en-US" dirty="0" err="1">
                 <a:solidFill>
                   <a:srgbClr val="000000"/>
@@ -9558,13 +9566,18 @@
               <a:t>Tkinter</a:t>
             </a:r>
             <a:r>
-              <a:rPr lang="ru-RU" dirty="0">
+              <a:rPr lang="ru-RU">
                 <a:solidFill>
                   <a:srgbClr val="000000"/>
                 </a:solidFill>
               </a:rPr>
-              <a:t>.</a:t>
+              <a:t>».</a:t>
             </a:r>
+            <a:endParaRPr lang="ru-RU" dirty="0">
+              <a:solidFill>
+                <a:srgbClr val="000000"/>
+              </a:solidFill>
+            </a:endParaRPr>
           </a:p>
         </p:txBody>
       </p:sp>
@@ -15503,16 +15516,7 @@
                         </a:solidFill>
                         <a:latin typeface="Cambria Math" panose="02040503050406030204" pitchFamily="18" charset="0"/>
                       </a:rPr>
-                      <m:t>𝑚𝑖</m:t>
-                    </m:r>
-                    <m:r>
-                      <a:rPr lang="en-US" sz="2000" i="1">
-                        <a:solidFill>
-                          <a:srgbClr val="000000"/>
-                        </a:solidFill>
-                        <a:latin typeface="Cambria Math" panose="02040503050406030204" pitchFamily="18" charset="0"/>
-                      </a:rPr>
-                      <m:t>𝑛</m:t>
+                      <m:t>𝑚𝑖𝑛</m:t>
                     </m:r>
                   </m:oMath>
                 </a14:m>
